--- a/assets/powerpoints/module-pub/E1-a-toi-la-capsule-et-le-slogan.pptx
+++ b/assets/powerpoints/module-pub/E1-a-toi-la-capsule-et-le-slogan.pptx
@@ -4365,7 +4365,7 @@
                 </a:solidFill>
                 <a:latin typeface="Verdana"/>
               </a:rPr>
-              <a:t>SÉANCE E1  ·  MODULE 7</a:t>
+              <a:t>SÉANCE E1  ·  MODULE 8</a:t>
             </a:r>
           </a:p>
         </p:txBody>
